--- a/content/docs/theory-analysis/envoy-architecture-istio/images/images.pptx
+++ b/content/docs/theory-analysis/envoy-architecture-istio/images/images.pptx
@@ -221,7 +221,7 @@
           <a:p>
             <a:fld id="{6CD5550B-26C4-49A9-A5BA-636EF7BE6CE9}" type="datetimeFigureOut">
               <a:rPr lang="ko-KR" altLang="en-US" smtClean="0"/>
-              <a:t>2026. 8. 14.</a:t>
+              <a:t>2026. 8. 15.</a:t>
             </a:fld>
             <a:endParaRPr lang="ko-KR" altLang="en-US"/>
           </a:p>
@@ -667,7 +667,7 @@
           <a:p>
             <a:fld id="{FB30EDBD-1C2D-4C1E-B459-B60219FAB484}" type="datetimeFigureOut">
               <a:rPr lang="ko-KR" altLang="en-US" smtClean="0"/>
-              <a:t>2026. 8. 14.</a:t>
+              <a:t>2026. 8. 15.</a:t>
             </a:fld>
             <a:endParaRPr lang="ko-KR" altLang="en-US"/>
           </a:p>
@@ -830,7 +830,7 @@
           <a:p>
             <a:fld id="{FB30EDBD-1C2D-4C1E-B459-B60219FAB484}" type="datetimeFigureOut">
               <a:rPr lang="ko-KR" altLang="en-US" smtClean="0"/>
-              <a:t>2026. 8. 14.</a:t>
+              <a:t>2026. 8. 15.</a:t>
             </a:fld>
             <a:endParaRPr lang="ko-KR" altLang="en-US"/>
           </a:p>
@@ -1003,7 +1003,7 @@
           <a:p>
             <a:fld id="{FB30EDBD-1C2D-4C1E-B459-B60219FAB484}" type="datetimeFigureOut">
               <a:rPr lang="ko-KR" altLang="en-US" smtClean="0"/>
-              <a:t>2026. 8. 14.</a:t>
+              <a:t>2026. 8. 15.</a:t>
             </a:fld>
             <a:endParaRPr lang="ko-KR" altLang="en-US"/>
           </a:p>
@@ -1166,7 +1166,7 @@
           <a:p>
             <a:fld id="{FB30EDBD-1C2D-4C1E-B459-B60219FAB484}" type="datetimeFigureOut">
               <a:rPr lang="ko-KR" altLang="en-US" smtClean="0"/>
-              <a:t>2026. 8. 14.</a:t>
+              <a:t>2026. 8. 15.</a:t>
             </a:fld>
             <a:endParaRPr lang="ko-KR" altLang="en-US"/>
           </a:p>
@@ -1406,7 +1406,7 @@
           <a:p>
             <a:fld id="{FB30EDBD-1C2D-4C1E-B459-B60219FAB484}" type="datetimeFigureOut">
               <a:rPr lang="ko-KR" altLang="en-US" smtClean="0"/>
-              <a:t>2026. 8. 14.</a:t>
+              <a:t>2026. 8. 15.</a:t>
             </a:fld>
             <a:endParaRPr lang="ko-KR" altLang="en-US"/>
           </a:p>
@@ -1686,7 +1686,7 @@
           <a:p>
             <a:fld id="{FB30EDBD-1C2D-4C1E-B459-B60219FAB484}" type="datetimeFigureOut">
               <a:rPr lang="ko-KR" altLang="en-US" smtClean="0"/>
-              <a:t>2026. 8. 14.</a:t>
+              <a:t>2026. 8. 15.</a:t>
             </a:fld>
             <a:endParaRPr lang="ko-KR" altLang="en-US"/>
           </a:p>
@@ -2100,7 +2100,7 @@
           <a:p>
             <a:fld id="{FB30EDBD-1C2D-4C1E-B459-B60219FAB484}" type="datetimeFigureOut">
               <a:rPr lang="ko-KR" altLang="en-US" smtClean="0"/>
-              <a:t>2026. 8. 14.</a:t>
+              <a:t>2026. 8. 15.</a:t>
             </a:fld>
             <a:endParaRPr lang="ko-KR" altLang="en-US"/>
           </a:p>
@@ -2212,7 +2212,7 @@
           <a:p>
             <a:fld id="{FB30EDBD-1C2D-4C1E-B459-B60219FAB484}" type="datetimeFigureOut">
               <a:rPr lang="ko-KR" altLang="en-US" smtClean="0"/>
-              <a:t>2026. 8. 14.</a:t>
+              <a:t>2026. 8. 15.</a:t>
             </a:fld>
             <a:endParaRPr lang="ko-KR" altLang="en-US"/>
           </a:p>
@@ -2302,7 +2302,7 @@
           <a:p>
             <a:fld id="{FB30EDBD-1C2D-4C1E-B459-B60219FAB484}" type="datetimeFigureOut">
               <a:rPr lang="ko-KR" altLang="en-US" smtClean="0"/>
-              <a:t>2026. 8. 14.</a:t>
+              <a:t>2026. 8. 15.</a:t>
             </a:fld>
             <a:endParaRPr lang="ko-KR" altLang="en-US"/>
           </a:p>
@@ -2572,7 +2572,7 @@
           <a:p>
             <a:fld id="{FB30EDBD-1C2D-4C1E-B459-B60219FAB484}" type="datetimeFigureOut">
               <a:rPr lang="ko-KR" altLang="en-US" smtClean="0"/>
-              <a:t>2026. 8. 14.</a:t>
+              <a:t>2026. 8. 15.</a:t>
             </a:fld>
             <a:endParaRPr lang="ko-KR" altLang="en-US"/>
           </a:p>
@@ -2819,7 +2819,7 @@
           <a:p>
             <a:fld id="{FB30EDBD-1C2D-4C1E-B459-B60219FAB484}" type="datetimeFigureOut">
               <a:rPr lang="ko-KR" altLang="en-US" smtClean="0"/>
-              <a:t>2026. 8. 14.</a:t>
+              <a:t>2026. 8. 15.</a:t>
             </a:fld>
             <a:endParaRPr lang="ko-KR" altLang="en-US"/>
           </a:p>
@@ -3025,7 +3025,7 @@
           <a:p>
             <a:fld id="{FB30EDBD-1C2D-4C1E-B459-B60219FAB484}" type="datetimeFigureOut">
               <a:rPr lang="ko-KR" altLang="en-US" smtClean="0"/>
-              <a:t>2026. 8. 14.</a:t>
+              <a:t>2026. 8. 15.</a:t>
             </a:fld>
             <a:endParaRPr lang="ko-KR" altLang="en-US"/>
           </a:p>
@@ -4970,8 +4970,8 @@
         </p:nvSpPr>
         <p:spPr>
           <a:xfrm>
-            <a:off x="3598684" y="483518"/>
-            <a:ext cx="1389510" cy="190936"/>
+            <a:off x="4018844" y="515689"/>
+            <a:ext cx="1149807" cy="129999"/>
           </a:xfrm>
           <a:prstGeom prst="roundRect">
             <a:avLst>
@@ -5006,14 +5006,40 @@
             <a:r>
               <a:rPr kumimoji="1" lang="en-US" altLang="ko-KR" sz="800" i="1">
                 <a:solidFill>
+                  <a:srgbClr val="002060"/>
+                </a:solidFill>
+              </a:rPr>
+              <a:t>Scrape</a:t>
+            </a:r>
+          </a:p>
+          <a:p>
+            <a:r>
+              <a:rPr kumimoji="1" lang="en-US" altLang="ko-KR" sz="800" i="1">
+                <a:solidFill>
+                  <a:srgbClr val="002060"/>
+                </a:solidFill>
+              </a:rPr>
+              <a:t>Envoy</a:t>
+            </a:r>
+            <a:r>
+              <a:rPr kumimoji="1" lang="en-US" altLang="ko-KR" sz="800" i="1">
+                <a:solidFill>
                   <a:schemeClr val="accent1"/>
                 </a:solidFill>
               </a:rPr>
-              <a:t>Scrape Metrics</a:t>
+              <a:t>&amp;App</a:t>
+            </a:r>
+            <a:r>
+              <a:rPr kumimoji="1" lang="en-US" altLang="ko-KR" sz="800" i="1">
+                <a:solidFill>
+                  <a:srgbClr val="002060"/>
+                </a:solidFill>
+              </a:rPr>
+              <a:t> Metrics</a:t>
             </a:r>
             <a:endParaRPr kumimoji="1" lang="ko-KR" altLang="en-US" sz="800" i="1">
               <a:solidFill>
-                <a:schemeClr val="accent1"/>
+                <a:srgbClr val="002060"/>
               </a:solidFill>
             </a:endParaRPr>
           </a:p>
@@ -5403,14 +5429,12 @@
           </p:cNvPr>
           <p:cNvCxnSpPr>
             <a:cxnSpLocks/>
-            <a:stCxn id="187" idx="2"/>
-            <a:endCxn id="28" idx="0"/>
           </p:cNvCxnSpPr>
           <p:nvPr/>
         </p:nvCxnSpPr>
         <p:spPr>
           <a:xfrm>
-            <a:off x="3643278" y="421335"/>
+            <a:off x="4063439" y="421335"/>
             <a:ext cx="0" cy="746890"/>
           </a:xfrm>
           <a:prstGeom prst="straightConnector1">
@@ -5418,7 +5442,7 @@
           </a:prstGeom>
           <a:ln w="12700">
             <a:solidFill>
-              <a:schemeClr val="accent1"/>
+              <a:srgbClr val="002060"/>
             </a:solidFill>
             <a:tailEnd type="triangle"/>
           </a:ln>
@@ -7590,7 +7614,7 @@
         </p:nvCxnSpPr>
         <p:spPr>
           <a:xfrm flipV="1">
-            <a:off x="6428325" y="2117670"/>
+            <a:off x="6444208" y="2117670"/>
             <a:ext cx="0" cy="1555435"/>
           </a:xfrm>
           <a:prstGeom prst="straightConnector1">
@@ -7673,19 +7697,19 @@
           </p:cNvPr>
           <p:cNvCxnSpPr>
             <a:cxnSpLocks/>
-            <a:stCxn id="187" idx="2"/>
+            <a:stCxn id="5" idx="4"/>
             <a:endCxn id="94" idx="0"/>
           </p:cNvCxnSpPr>
           <p:nvPr/>
         </p:nvCxnSpPr>
         <p:spPr>
           <a:xfrm rot="5400000">
-            <a:off x="2399710" y="-6277"/>
-            <a:ext cx="815956" cy="1671181"/>
+            <a:off x="2180562" y="206730"/>
+            <a:ext cx="822096" cy="1239026"/>
           </a:xfrm>
           <a:prstGeom prst="bentConnector3">
             <a:avLst>
-              <a:gd name="adj1" fmla="val 59339"/>
+              <a:gd name="adj1" fmla="val 57786"/>
             </a:avLst>
           </a:prstGeom>
           <a:ln w="12700">
@@ -7840,6 +7864,129 @@
                 <a:schemeClr val="accent1"/>
               </a:solidFill>
             </a:endParaRPr>
+          </a:p>
+        </p:txBody>
+      </p:sp>
+      <p:sp>
+        <p:nvSpPr>
+          <p:cNvPr id="3" name="모서리가 둥근 직사각형 2">
+            <a:extLst>
+              <a:ext uri="{FF2B5EF4-FFF2-40B4-BE49-F238E27FC236}">
+                <a16:creationId xmlns:a16="http://schemas.microsoft.com/office/drawing/2014/main" id="{202C9966-3366-AF4A-7B03-CBA924BE6C46}"/>
+              </a:ext>
+            </a:extLst>
+          </p:cNvPr>
+          <p:cNvSpPr/>
+          <p:nvPr/>
+        </p:nvSpPr>
+        <p:spPr>
+          <a:xfrm>
+            <a:off x="3169970" y="483518"/>
+            <a:ext cx="835748" cy="190936"/>
+          </a:xfrm>
+          <a:prstGeom prst="roundRect">
+            <a:avLst>
+              <a:gd name="adj" fmla="val 12191"/>
+            </a:avLst>
+          </a:prstGeom>
+          <a:noFill/>
+          <a:ln w="12700">
+            <a:noFill/>
+          </a:ln>
+        </p:spPr>
+        <p:style>
+          <a:lnRef idx="2">
+            <a:schemeClr val="accent1">
+              <a:shade val="15000"/>
+            </a:schemeClr>
+          </a:lnRef>
+          <a:fillRef idx="1">
+            <a:schemeClr val="accent1"/>
+          </a:fillRef>
+          <a:effectRef idx="0">
+            <a:schemeClr val="accent1"/>
+          </a:effectRef>
+          <a:fontRef idx="minor">
+            <a:schemeClr val="lt1"/>
+          </a:fontRef>
+        </p:style>
+        <p:txBody>
+          <a:bodyPr rtlCol="0" anchor="ctr"/>
+          <a:lstStyle/>
+          <a:p>
+            <a:r>
+              <a:rPr kumimoji="1" lang="en-US" altLang="ko-KR" sz="800" i="1">
+                <a:solidFill>
+                  <a:schemeClr val="accent1"/>
+                </a:solidFill>
+              </a:rPr>
+              <a:t>Scrape</a:t>
+            </a:r>
+          </a:p>
+          <a:p>
+            <a:r>
+              <a:rPr kumimoji="1" lang="en-US" altLang="ko-KR" sz="800" i="1">
+                <a:solidFill>
+                  <a:schemeClr val="accent1"/>
+                </a:solidFill>
+              </a:rPr>
+              <a:t>App Metrics</a:t>
+            </a:r>
+            <a:endParaRPr kumimoji="1" lang="ko-KR" altLang="en-US" sz="800" i="1">
+              <a:solidFill>
+                <a:schemeClr val="accent1"/>
+              </a:solidFill>
+            </a:endParaRPr>
+          </a:p>
+        </p:txBody>
+      </p:sp>
+      <p:sp>
+        <p:nvSpPr>
+          <p:cNvPr id="5" name="타원 4">
+            <a:extLst>
+              <a:ext uri="{FF2B5EF4-FFF2-40B4-BE49-F238E27FC236}">
+                <a16:creationId xmlns:a16="http://schemas.microsoft.com/office/drawing/2014/main" id="{31AED53A-F96D-C10C-1155-733D03A15E38}"/>
+              </a:ext>
+            </a:extLst>
+          </p:cNvPr>
+          <p:cNvSpPr/>
+          <p:nvPr/>
+        </p:nvSpPr>
+        <p:spPr>
+          <a:xfrm>
+            <a:off x="2939414" y="-128222"/>
+            <a:ext cx="543417" cy="543417"/>
+          </a:xfrm>
+          <a:prstGeom prst="ellipse">
+            <a:avLst/>
+          </a:prstGeom>
+          <a:noFill/>
+          <a:ln>
+            <a:noFill/>
+          </a:ln>
+        </p:spPr>
+        <p:style>
+          <a:lnRef idx="2">
+            <a:schemeClr val="accent1">
+              <a:shade val="15000"/>
+            </a:schemeClr>
+          </a:lnRef>
+          <a:fillRef idx="1">
+            <a:schemeClr val="accent1"/>
+          </a:fillRef>
+          <a:effectRef idx="0">
+            <a:schemeClr val="accent1"/>
+          </a:effectRef>
+          <a:fontRef idx="minor">
+            <a:schemeClr val="lt1"/>
+          </a:fontRef>
+        </p:style>
+        <p:txBody>
+          <a:bodyPr rtlCol="0" anchor="ctr"/>
+          <a:lstStyle/>
+          <a:p>
+            <a:pPr algn="ctr"/>
+            <a:endParaRPr kumimoji="1" lang="ko-KR" altLang="en-US"/>
           </a:p>
         </p:txBody>
       </p:sp>

--- a/content/docs/theory-analysis/envoy-architecture-istio/images/images.pptx
+++ b/content/docs/theory-analysis/envoy-architecture-istio/images/images.pptx
@@ -223,7 +223,7 @@
           <a:p>
             <a:fld id="{6CD5550B-26C4-49A9-A5BA-636EF7BE6CE9}" type="datetimeFigureOut">
               <a:rPr lang="ko-KR" altLang="en-US" smtClean="0"/>
-              <a:t>2026. 8. 15.</a:t>
+              <a:t>2026. 8. 31.</a:t>
             </a:fld>
             <a:endParaRPr lang="ko-KR" altLang="en-US"/>
           </a:p>
@@ -669,7 +669,7 @@
           <a:p>
             <a:fld id="{FB30EDBD-1C2D-4C1E-B459-B60219FAB484}" type="datetimeFigureOut">
               <a:rPr lang="ko-KR" altLang="en-US" smtClean="0"/>
-              <a:t>2026. 8. 15.</a:t>
+              <a:t>2026. 8. 31.</a:t>
             </a:fld>
             <a:endParaRPr lang="ko-KR" altLang="en-US"/>
           </a:p>
@@ -832,7 +832,7 @@
           <a:p>
             <a:fld id="{FB30EDBD-1C2D-4C1E-B459-B60219FAB484}" type="datetimeFigureOut">
               <a:rPr lang="ko-KR" altLang="en-US" smtClean="0"/>
-              <a:t>2026. 8. 15.</a:t>
+              <a:t>2026. 8. 31.</a:t>
             </a:fld>
             <a:endParaRPr lang="ko-KR" altLang="en-US"/>
           </a:p>
@@ -1005,7 +1005,7 @@
           <a:p>
             <a:fld id="{FB30EDBD-1C2D-4C1E-B459-B60219FAB484}" type="datetimeFigureOut">
               <a:rPr lang="ko-KR" altLang="en-US" smtClean="0"/>
-              <a:t>2026. 8. 15.</a:t>
+              <a:t>2026. 8. 31.</a:t>
             </a:fld>
             <a:endParaRPr lang="ko-KR" altLang="en-US"/>
           </a:p>
@@ -1168,7 +1168,7 @@
           <a:p>
             <a:fld id="{FB30EDBD-1C2D-4C1E-B459-B60219FAB484}" type="datetimeFigureOut">
               <a:rPr lang="ko-KR" altLang="en-US" smtClean="0"/>
-              <a:t>2026. 8. 15.</a:t>
+              <a:t>2026. 8. 31.</a:t>
             </a:fld>
             <a:endParaRPr lang="ko-KR" altLang="en-US"/>
           </a:p>
@@ -1408,7 +1408,7 @@
           <a:p>
             <a:fld id="{FB30EDBD-1C2D-4C1E-B459-B60219FAB484}" type="datetimeFigureOut">
               <a:rPr lang="ko-KR" altLang="en-US" smtClean="0"/>
-              <a:t>2026. 8. 15.</a:t>
+              <a:t>2026. 8. 31.</a:t>
             </a:fld>
             <a:endParaRPr lang="ko-KR" altLang="en-US"/>
           </a:p>
@@ -1688,7 +1688,7 @@
           <a:p>
             <a:fld id="{FB30EDBD-1C2D-4C1E-B459-B60219FAB484}" type="datetimeFigureOut">
               <a:rPr lang="ko-KR" altLang="en-US" smtClean="0"/>
-              <a:t>2026. 8. 15.</a:t>
+              <a:t>2026. 8. 31.</a:t>
             </a:fld>
             <a:endParaRPr lang="ko-KR" altLang="en-US"/>
           </a:p>
@@ -2102,7 +2102,7 @@
           <a:p>
             <a:fld id="{FB30EDBD-1C2D-4C1E-B459-B60219FAB484}" type="datetimeFigureOut">
               <a:rPr lang="ko-KR" altLang="en-US" smtClean="0"/>
-              <a:t>2026. 8. 15.</a:t>
+              <a:t>2026. 8. 31.</a:t>
             </a:fld>
             <a:endParaRPr lang="ko-KR" altLang="en-US"/>
           </a:p>
@@ -2214,7 +2214,7 @@
           <a:p>
             <a:fld id="{FB30EDBD-1C2D-4C1E-B459-B60219FAB484}" type="datetimeFigureOut">
               <a:rPr lang="ko-KR" altLang="en-US" smtClean="0"/>
-              <a:t>2026. 8. 15.</a:t>
+              <a:t>2026. 8. 31.</a:t>
             </a:fld>
             <a:endParaRPr lang="ko-KR" altLang="en-US"/>
           </a:p>
@@ -2304,7 +2304,7 @@
           <a:p>
             <a:fld id="{FB30EDBD-1C2D-4C1E-B459-B60219FAB484}" type="datetimeFigureOut">
               <a:rPr lang="ko-KR" altLang="en-US" smtClean="0"/>
-              <a:t>2026. 8. 15.</a:t>
+              <a:t>2026. 8. 31.</a:t>
             </a:fld>
             <a:endParaRPr lang="ko-KR" altLang="en-US"/>
           </a:p>
@@ -2574,7 +2574,7 @@
           <a:p>
             <a:fld id="{FB30EDBD-1C2D-4C1E-B459-B60219FAB484}" type="datetimeFigureOut">
               <a:rPr lang="ko-KR" altLang="en-US" smtClean="0"/>
-              <a:t>2026. 8. 15.</a:t>
+              <a:t>2026. 8. 31.</a:t>
             </a:fld>
             <a:endParaRPr lang="ko-KR" altLang="en-US"/>
           </a:p>
@@ -2821,7 +2821,7 @@
           <a:p>
             <a:fld id="{FB30EDBD-1C2D-4C1E-B459-B60219FAB484}" type="datetimeFigureOut">
               <a:rPr lang="ko-KR" altLang="en-US" smtClean="0"/>
-              <a:t>2026. 8. 15.</a:t>
+              <a:t>2026. 8. 31.</a:t>
             </a:fld>
             <a:endParaRPr lang="ko-KR" altLang="en-US"/>
           </a:p>
@@ -3027,7 +3027,7 @@
           <a:p>
             <a:fld id="{FB30EDBD-1C2D-4C1E-B459-B60219FAB484}" type="datetimeFigureOut">
               <a:rPr lang="ko-KR" altLang="en-US" smtClean="0"/>
-              <a:t>2026. 8. 15.</a:t>
+              <a:t>2026. 8. 31.</a:t>
             </a:fld>
             <a:endParaRPr lang="ko-KR" altLang="en-US"/>
           </a:p>
@@ -5630,6 +5630,17 @@
               </a:rPr>
               <a:t>iptables</a:t>
             </a:r>
+          </a:p>
+          <a:p>
+            <a:pPr algn="ctr"/>
+            <a:r>
+              <a:rPr kumimoji="1" lang="en-US" altLang="ko-KR" sz="800" b="1">
+                <a:solidFill>
+                  <a:schemeClr val="tx1"/>
+                </a:solidFill>
+              </a:rPr>
+              <a:t>Redirection Rules</a:t>
+            </a:r>
             <a:endParaRPr kumimoji="1" lang="ko-KR" altLang="en-US" sz="800" b="1">
               <a:solidFill>
                 <a:schemeClr val="tx1"/>

--- a/content/docs/theory-analysis/envoy-architecture-istio/images/images.pptx
+++ b/content/docs/theory-analysis/envoy-architecture-istio/images/images.pptx
@@ -5628,20 +5628,28 @@
                   <a:schemeClr val="tx1"/>
                 </a:solidFill>
               </a:rPr>
+              <a:t> Redirection</a:t>
+            </a:r>
+          </a:p>
+          <a:p>
+            <a:pPr algn="ctr"/>
+            <a:r>
+              <a:rPr kumimoji="1" lang="en" altLang="ko-KR" sz="800">
+                <a:solidFill>
+                  <a:schemeClr val="tx1"/>
+                </a:solidFill>
+              </a:rPr>
               <a:t>iptables</a:t>
             </a:r>
-          </a:p>
-          <a:p>
-            <a:pPr algn="ctr"/>
-            <a:r>
-              <a:rPr kumimoji="1" lang="en-US" altLang="ko-KR" sz="800" b="1">
-                <a:solidFill>
-                  <a:schemeClr val="tx1"/>
-                </a:solidFill>
-              </a:rPr>
-              <a:t>Redirection Rules</a:t>
-            </a:r>
-            <a:endParaRPr kumimoji="1" lang="ko-KR" altLang="en-US" sz="800" b="1">
+            <a:r>
+              <a:rPr kumimoji="1" lang="en-US" altLang="ko-KR" sz="800">
+                <a:solidFill>
+                  <a:schemeClr val="tx1"/>
+                </a:solidFill>
+              </a:rPr>
+              <a:t> Rules</a:t>
+            </a:r>
+            <a:endParaRPr kumimoji="1" lang="ko-KR" altLang="en-US" sz="800">
               <a:solidFill>
                 <a:schemeClr val="tx1"/>
               </a:solidFill>
